--- a/Topic_C/Exam_Practice/TC-L12_Writing_Workshop_Review_Four_Skills_Assessment.pptx
+++ b/Topic_C/Exam_Practice/TC-L12_Writing_Workshop_Review_Four_Skills_Assessment.pptx
@@ -784,7 +784,11 @@
           <a:lstStyle/>
           <a:p>
             <a:r>
-              <a:rPr lang="en-US" dirty="0"/>
+              <a:rPr lang="ar-SA" dirty="0">
+                <a:latin typeface="Amiri" pitchFamily="2" charset="-78"/>
+                <a:ea typeface="Amiri" pitchFamily="2" charset="-78"/>
+                <a:cs typeface="Amiri" pitchFamily="2" charset="-78"/>
+              </a:rPr>
               <a:t>Q3 (3 min to choose and read). Title (أ) suits Core and Develop; title (ب) suits Stretch.</a:t>
             </a:r>
             <a:endParaRPr lang="en-US" dirty="0"/>
@@ -1403,7 +1407,11 @@
           <a:lstStyle/>
           <a:p>
             <a:r>
-              <a:rPr lang="en-US" dirty="0"/>
+              <a:rPr lang="ar-SA" dirty="0">
+                <a:latin typeface="Amiri" pitchFamily="2" charset="-78"/>
+                <a:ea typeface="Amiri" pitchFamily="2" charset="-78"/>
+                <a:cs typeface="Amiri" pitchFamily="2" charset="-78"/>
+              </a:rPr>
               <a:t>WELCOME (1 min) — while students join.
 • Greet each student by name as they arrive: السَّلَامُ عَلَيْكُمْ. Take the register (Pastoral Tracker: attendance 0/1).
 • 2-MINUTE CHECK-IN (SEND training): a private chat to any student who seemed unsettled last lesson — “Are you okay today? 👍 / 👎”.
@@ -1936,7 +1944,11 @@
           <a:lstStyle/>
           <a:p>
             <a:r>
-              <a:rPr lang="en-US" dirty="0"/>
+              <a:rPr lang="ar-SA" dirty="0">
+                <a:latin typeface="Amiri" pitchFamily="2" charset="-78"/>
+                <a:ea typeface="Amiri" pitchFamily="2" charset="-78"/>
+                <a:cs typeface="Amiri" pitchFamily="2" charset="-78"/>
+              </a:rPr>
               <a:t>Question words: أَيْنَ (where) · كَيْفَ (what … like) · قَارِنِي (compare!) · اشْتَرَيْتِ / فَعَلْتِ (bought / did — PAST) · سَتَفْعَلِينَ (will do — FUTURE).</a:t>
             </a:r>
             <a:endParaRPr lang="en-US" dirty="0"/>
@@ -2508,6 +2520,7 @@
                   <a:srgbClr val="D4AF37"/>
                 </a:solidFill>
                 <a:latin typeface="Amiri" pitchFamily="2" charset="-78"/>
+                <a:ea typeface="Amiri" pitchFamily="2" charset="-78"/>
                 <a:cs typeface="Amiri" pitchFamily="2" charset="-78"/>
               </a:rPr>
               <a:t>م</a:t>
@@ -2714,6 +2727,7 @@
                   <a:srgbClr val="D4AF37"/>
                 </a:solidFill>
                 <a:latin typeface="Amiri" pitchFamily="2" charset="-78"/>
+                <a:ea typeface="Amiri" pitchFamily="2" charset="-78"/>
                 <a:cs typeface="Amiri" pitchFamily="2" charset="-78"/>
               </a:rPr>
               <a:t>وَرْشَةُ الكِتَابَةِ — امْتِحَانٌ تَجْرِيبِيٌّ</a:t>
@@ -3171,6 +3185,7 @@
                   <a:srgbClr val="D4AF37"/>
                 </a:solidFill>
                 <a:latin typeface="Amiri" pitchFamily="2" charset="-78"/>
+                <a:ea typeface="Amiri" pitchFamily="2" charset="-78"/>
                 <a:cs typeface="Amiri" pitchFamily="2" charset="-78"/>
               </a:rPr>
               <a:t>م</a:t>
@@ -3491,6 +3506,7 @@
                   <a:srgbClr val="8A6D1E"/>
                 </a:solidFill>
                 <a:latin typeface="Amiri" pitchFamily="2" charset="-78"/>
+                <a:ea typeface="Amiri" pitchFamily="2" charset="-78"/>
                 <a:cs typeface="Amiri" pitchFamily="2" charset="-78"/>
               </a:rPr>
               <a:t>نَمُوذَجُ الإِجَابَةِ</a:t>
@@ -3604,6 +3620,7 @@
                   <a:srgbClr val="1F2A37"/>
                 </a:solidFill>
                 <a:latin typeface="Amiri" pitchFamily="2" charset="-78"/>
+                <a:ea typeface="Amiri" pitchFamily="2" charset="-78"/>
                 <a:cs typeface="Amiri" pitchFamily="2" charset="-78"/>
               </a:rPr>
               <a:t>مَرْحَبًا يَا سَلْمَى،</a:t>
@@ -3623,6 +3640,7 @@
                   <a:srgbClr val="1F2A37"/>
                 </a:solidFill>
                 <a:latin typeface="Amiri" pitchFamily="2" charset="-78"/>
+                <a:ea typeface="Amiri" pitchFamily="2" charset="-78"/>
                 <a:cs typeface="Amiri" pitchFamily="2" charset="-78"/>
               </a:rPr>
               <a:t>كَيْفَ حَالُكِ؟ أَنَا الآنَ فِي مَدِينَةِ فَاسَ فِي المَغْرِبِ. حَجَزْنَا شَقَّةً قَدِيمَةً قُرْبَ السُّوقِ، وَهِيَ مَبْنِيَّةٌ مِنَ الحَجَرِ. المَدِينَةُ جَمِيلَةٌ؛ فِيهَا شَوَارِعُ ضَيِّقَةٌ وَمَسَاجِدُ قَدِيمَةٌ. الجَوُّ حَارٌّ وَمُشْمِسٌ، وَهُوَ أَحَرُّ مِنْ جَوِّ لَنْدَنَ بِكَثِيرٍ. أَمْسِ ذَهَبْتُ إِلَى السُّوقِ، وَاشْتَرَيْتُ حَقِيبَةً جِلْدِيَّةً حَمْرَاءَ، وَكَانَ ثَمَنُهَا عِشْرِينَ جُنَيْهًا فَقَطْ. فِي رَأْيِي، فَاسُ مَدِينَةٌ رَائِعَةٌ. غَدًا سَنَزُورُ جِبَالَ الأَطْلَسِ بِالحَافِلَةِ، وَسَأُرْسِلُ لَكِ صُوَرًا.</a:t>
@@ -3642,6 +3660,7 @@
                   <a:srgbClr val="1F2A37"/>
                 </a:solidFill>
                 <a:latin typeface="Amiri" pitchFamily="2" charset="-78"/>
+                <a:ea typeface="Amiri" pitchFamily="2" charset="-78"/>
                 <a:cs typeface="Amiri" pitchFamily="2" charset="-78"/>
               </a:rPr>
               <a:t>مَعَ السَّلَامَةِ،</a:t>
@@ -3661,6 +3680,7 @@
                   <a:srgbClr val="1F2A37"/>
                 </a:solidFill>
                 <a:latin typeface="Amiri" pitchFamily="2" charset="-78"/>
+                <a:ea typeface="Amiri" pitchFamily="2" charset="-78"/>
                 <a:cs typeface="Amiri" pitchFamily="2" charset="-78"/>
               </a:rPr>
               <a:t>هُدَى</a:t>
@@ -3824,11 +3844,12 @@
               <a:buNone/>
             </a:pPr>
             <a:r>
-              <a:rPr lang="en-US" sz="950" b="1" dirty="0">
+              <a:rPr lang="ar-SA" sz="950" b="1" dirty="0">
                 <a:solidFill>
                   <a:srgbClr val="FFFFFF"/>
                 </a:solidFill>
                 <a:latin typeface="Calibri" pitchFamily="34" charset="0"/>
+                <a:ea typeface="Amiri" pitchFamily="2" charset="-78"/>
                 <a:cs typeface="Amiri" pitchFamily="2" charset="-78"/>
               </a:rPr>
               <a:t>مَبْنِيَّةٌ مِنَ الحَجَرِ</a:t>
@@ -3889,11 +3910,12 @@
               <a:buNone/>
             </a:pPr>
             <a:r>
-              <a:rPr lang="en-US" sz="950" b="1" dirty="0">
+              <a:rPr lang="ar-SA" sz="950" b="1" dirty="0">
                 <a:solidFill>
                   <a:srgbClr val="FFFFFF"/>
                 </a:solidFill>
                 <a:latin typeface="Calibri" pitchFamily="34" charset="0"/>
+                <a:ea typeface="Amiri" pitchFamily="2" charset="-78"/>
                 <a:cs typeface="Amiri" pitchFamily="2" charset="-78"/>
               </a:rPr>
               <a:t>أَحَرُّ مِنْ جَوِّ لَنْدَنَ</a:t>
@@ -3954,11 +3976,12 @@
               <a:buNone/>
             </a:pPr>
             <a:r>
-              <a:rPr lang="en-US" sz="950" b="1" dirty="0">
+              <a:rPr lang="ar-SA" sz="950" b="1" dirty="0">
                 <a:solidFill>
                   <a:srgbClr val="FFFFFF"/>
                 </a:solidFill>
                 <a:latin typeface="Calibri" pitchFamily="34" charset="0"/>
+                <a:ea typeface="Amiri" pitchFamily="2" charset="-78"/>
                 <a:cs typeface="Amiri" pitchFamily="2" charset="-78"/>
               </a:rPr>
               <a:t>كَانَ ثَمَنُهَا عِشْرِينَ</a:t>
@@ -4019,11 +4042,12 @@
               <a:buNone/>
             </a:pPr>
             <a:r>
-              <a:rPr lang="en-US" sz="950" b="1" dirty="0">
+              <a:rPr lang="ar-SA" sz="950" b="1" dirty="0">
                 <a:solidFill>
                   <a:srgbClr val="FFFFFF"/>
                 </a:solidFill>
                 <a:latin typeface="Calibri" pitchFamily="34" charset="0"/>
+                <a:ea typeface="Amiri" pitchFamily="2" charset="-78"/>
                 <a:cs typeface="Amiri" pitchFamily="2" charset="-78"/>
               </a:rPr>
               <a:t>غَدًا سَنَزُورُ</a:t>
@@ -4157,6 +4181,7 @@
                   <a:srgbClr val="D4AF37"/>
                 </a:solidFill>
                 <a:latin typeface="Amiri" pitchFamily="2" charset="-78"/>
+                <a:ea typeface="Amiri" pitchFamily="2" charset="-78"/>
                 <a:cs typeface="Amiri" pitchFamily="2" charset="-78"/>
               </a:rPr>
               <a:t>م</a:t>
@@ -4477,6 +4502,7 @@
                   <a:srgbClr val="8A6D1E"/>
                 </a:solidFill>
                 <a:latin typeface="Amiri" pitchFamily="2" charset="-78"/>
+                <a:ea typeface="Amiri" pitchFamily="2" charset="-78"/>
                 <a:cs typeface="Amiri" pitchFamily="2" charset="-78"/>
               </a:rPr>
               <a:t>نَمُوذَجُ الإِجَابَةِ</a:t>
@@ -4590,6 +4616,7 @@
                   <a:srgbClr val="1F2A37"/>
                 </a:solidFill>
                 <a:latin typeface="Amiri" pitchFamily="2" charset="-78"/>
+                <a:ea typeface="Amiri" pitchFamily="2" charset="-78"/>
                 <a:cs typeface="Amiri" pitchFamily="2" charset="-78"/>
               </a:rPr>
               <a:t>عَزِيزَتِي سَلْمَى،</a:t>
@@ -4609,6 +4636,7 @@
                   <a:srgbClr val="1F2A37"/>
                 </a:solidFill>
                 <a:latin typeface="Amiri" pitchFamily="2" charset="-78"/>
+                <a:ea typeface="Amiri" pitchFamily="2" charset="-78"/>
                 <a:cs typeface="Amiri" pitchFamily="2" charset="-78"/>
               </a:rPr>
               <a:t>تَحِيَّةً مِنْ فَاسَ! وَصَلْنَا قَبْلَ يَوْمَيْنِ بَعْدَ رِحْلَةٍ طَوِيلَةٍ بِالقِطَارِ، وَنُقِيمُ فِي بَيْتٍ تَقْلِيدِيٍّ حَجَزْنَاهُ عَلَى الإِنْتَرْنِتِ، جُدْرَانُهُ مَبْنِيَّةٌ مِنَ الحَجَرِ، وَفِي وَسَطِهِ نَافُورَةٌ دَائِرِيَّةٌ. وَالمَدِينَةُ القَدِيمَةُ مَتَاهَةٌ مِنَ الأَزِقَّةِ الضَّيِّقَةِ الَّتِي لَا تَدْخُلُهَا السَّيَّارَاتُ، لِذٰلِكَ هَوَاؤُهَا أَنْظَفُ مِمَّا تَوَقَّعْتُ. أَمَّا الجَوُّ فَحَارٌّ نَهَارًا وَمُعْتَدِلٌ لَيْلًا. وَأَمْسِ ضِعْنَا فِي السُّوقِ سَاعَةً كَامِلَةً، حَتَّى سَاعَدَنَا بَائِعٌ لَطِيفٌ اشْتَرَيْتُ مِنْهُ حَقِيبَةً جِلْدِيَّةً بِعِشْرِينَ جُنَيْهًا. صَحِيحٌ أَنَّ المَدِينَةَ مُزْدَحِمَةٌ، غَيْرَ أَنَّ سِحْرَهَا لَا يُقَاوَمُ. وَإِذَا كَانَ الطَّقْسُ مُنَاسِبًا غَدًا، فَسَنَزُورُ جِبَالَ الأَطْلَسِ.</a:t>
@@ -4628,6 +4656,7 @@
                   <a:srgbClr val="1F2A37"/>
                 </a:solidFill>
                 <a:latin typeface="Amiri" pitchFamily="2" charset="-78"/>
+                <a:ea typeface="Amiri" pitchFamily="2" charset="-78"/>
                 <a:cs typeface="Amiri" pitchFamily="2" charset="-78"/>
               </a:rPr>
               <a:t>بِمَحَبَّةٍ،</a:t>
@@ -4647,6 +4676,7 @@
                   <a:srgbClr val="1F2A37"/>
                 </a:solidFill>
                 <a:latin typeface="Amiri" pitchFamily="2" charset="-78"/>
+                <a:ea typeface="Amiri" pitchFamily="2" charset="-78"/>
                 <a:cs typeface="Amiri" pitchFamily="2" charset="-78"/>
               </a:rPr>
               <a:t>هُدَى</a:t>
@@ -4810,11 +4840,12 @@
               <a:buNone/>
             </a:pPr>
             <a:r>
-              <a:rPr lang="en-US" sz="950" b="1" dirty="0">
+              <a:rPr lang="ar-SA" sz="950" b="1" dirty="0">
                 <a:solidFill>
                   <a:srgbClr val="FFFFFF"/>
                 </a:solidFill>
                 <a:latin typeface="Calibri" pitchFamily="34" charset="0"/>
+                <a:ea typeface="Amiri" pitchFamily="2" charset="-78"/>
                 <a:cs typeface="Amiri" pitchFamily="2" charset="-78"/>
               </a:rPr>
               <a:t>حَجَزْنَاهُ عَلَى الإِنْتَرْنِتِ</a:t>
@@ -4875,11 +4906,12 @@
               <a:buNone/>
             </a:pPr>
             <a:r>
-              <a:rPr lang="en-US" sz="950" b="1" dirty="0">
+              <a:rPr lang="ar-SA" sz="950" b="1" dirty="0">
                 <a:solidFill>
                   <a:srgbClr val="FFFFFF"/>
                 </a:solidFill>
                 <a:latin typeface="Calibri" pitchFamily="34" charset="0"/>
+                <a:ea typeface="Amiri" pitchFamily="2" charset="-78"/>
                 <a:cs typeface="Amiri" pitchFamily="2" charset="-78"/>
               </a:rPr>
               <a:t>أَنْظَفُ مِمَّا تَوَقَّعْتُ</a:t>
@@ -4940,11 +4972,12 @@
               <a:buNone/>
             </a:pPr>
             <a:r>
-              <a:rPr lang="en-US" sz="950" b="1" dirty="0">
+              <a:rPr lang="ar-SA" sz="950" b="1" dirty="0">
                 <a:solidFill>
                   <a:srgbClr val="FFFFFF"/>
                 </a:solidFill>
                 <a:latin typeface="Calibri" pitchFamily="34" charset="0"/>
+                <a:ea typeface="Amiri" pitchFamily="2" charset="-78"/>
                 <a:cs typeface="Amiri" pitchFamily="2" charset="-78"/>
               </a:rPr>
               <a:t>حَتَّى سَاعَدَنَا</a:t>
@@ -5005,11 +5038,12 @@
               <a:buNone/>
             </a:pPr>
             <a:r>
-              <a:rPr lang="en-US" sz="950" b="1" dirty="0">
+              <a:rPr lang="ar-SA" sz="950" b="1" dirty="0">
                 <a:solidFill>
                   <a:srgbClr val="FFFFFF"/>
                 </a:solidFill>
                 <a:latin typeface="Calibri" pitchFamily="34" charset="0"/>
+                <a:ea typeface="Amiri" pitchFamily="2" charset="-78"/>
                 <a:cs typeface="Amiri" pitchFamily="2" charset="-78"/>
               </a:rPr>
               <a:t>إِذَا كَانَ … فَسَنَزُورُ</a:t>
@@ -5143,6 +5177,7 @@
                   <a:srgbClr val="D4AF37"/>
                 </a:solidFill>
                 <a:latin typeface="Amiri" pitchFamily="2" charset="-78"/>
+                <a:ea typeface="Amiri" pitchFamily="2" charset="-78"/>
                 <a:cs typeface="Amiri" pitchFamily="2" charset="-78"/>
               </a:rPr>
               <a:t>م</a:t>
@@ -5463,6 +5498,7 @@
                   <a:srgbClr val="8A6D1E"/>
                 </a:solidFill>
                 <a:latin typeface="Amiri" pitchFamily="2" charset="-78"/>
+                <a:ea typeface="Amiri" pitchFamily="2" charset="-78"/>
                 <a:cs typeface="Amiri" pitchFamily="2" charset="-78"/>
               </a:rPr>
               <a:t>اخْتَرْ عُنْوَانًا وَاحِدًا</a:t>
@@ -5743,6 +5779,7 @@
                   <a:srgbClr val="1B3B6F"/>
                 </a:solidFill>
                 <a:latin typeface="Amiri" pitchFamily="2" charset="-78"/>
+                <a:ea typeface="Amiri" pitchFamily="2" charset="-78"/>
                 <a:cs typeface="Amiri" pitchFamily="2" charset="-78"/>
               </a:rPr>
               <a:t>رِحْلَةٌ عَلَّمَتْنِي الكَثِيرَ</a:t>
@@ -5781,6 +5818,7 @@
                   <a:srgbClr val="1B3B6F"/>
                 </a:solidFill>
                 <a:latin typeface="Amiri" pitchFamily="2" charset="-78"/>
+                <a:ea typeface="Amiri" pitchFamily="2" charset="-78"/>
                 <a:cs typeface="Amiri" pitchFamily="2" charset="-78"/>
               </a:rPr>
               <a:t>(أ)</a:t>
@@ -5884,6 +5922,7 @@
                   <a:srgbClr val="1B3B6F"/>
                 </a:solidFill>
                 <a:latin typeface="Amiri" pitchFamily="2" charset="-78"/>
+                <a:ea typeface="Amiri" pitchFamily="2" charset="-78"/>
                 <a:cs typeface="Amiri" pitchFamily="2" charset="-78"/>
               </a:rPr>
               <a:t>أَيْنَ وَكَيْفَ سَافَرْتَ · الأَمَاكِنُ وَالطَّقْسُ · مَوْقِفٌ لَا تَنْسَاهُ · رَأْيُكَ وَخِطَطُكَ</a:t>
@@ -6015,6 +6054,7 @@
                   <a:srgbClr val="1B3B6F"/>
                 </a:solidFill>
                 <a:latin typeface="Amiri" pitchFamily="2" charset="-78"/>
+                <a:ea typeface="Amiri" pitchFamily="2" charset="-78"/>
                 <a:cs typeface="Amiri" pitchFamily="2" charset="-78"/>
               </a:rPr>
               <a:t>العَالَمُ المُتَّصِلُ: نِعْمَةٌ أَمْ عِبْءٌ عَلَى الكَوْكَبِ؟</a:t>
@@ -6053,6 +6093,7 @@
                   <a:srgbClr val="1B3B6F"/>
                 </a:solidFill>
                 <a:latin typeface="Amiri" pitchFamily="2" charset="-78"/>
+                <a:ea typeface="Amiri" pitchFamily="2" charset="-78"/>
                 <a:cs typeface="Amiri" pitchFamily="2" charset="-78"/>
               </a:rPr>
               <a:t>(ب)</a:t>
@@ -6156,6 +6197,7 @@
                   <a:srgbClr val="1B3B6F"/>
                 </a:solidFill>
                 <a:latin typeface="Amiri" pitchFamily="2" charset="-78"/>
+                <a:ea typeface="Amiri" pitchFamily="2" charset="-78"/>
                 <a:cs typeface="Amiri" pitchFamily="2" charset="-78"/>
               </a:rPr>
               <a:t>عَالَمٌ مُتَّصِلٌ · الإِيجَابِيَّاتُ وَالسَّلْبِيَّاتُ · مِثَالٌ مِنْ حَيَاتِكَ · رَأْيُكَ</a:t>
@@ -6355,6 +6397,7 @@
                   <a:srgbClr val="D4AF37"/>
                 </a:solidFill>
                 <a:latin typeface="Amiri" pitchFamily="2" charset="-78"/>
+                <a:ea typeface="Amiri" pitchFamily="2" charset="-78"/>
                 <a:cs typeface="Amiri" pitchFamily="2" charset="-78"/>
               </a:rPr>
               <a:t>م</a:t>
@@ -6675,6 +6718,7 @@
                   <a:srgbClr val="8A6D1E"/>
                 </a:solidFill>
                 <a:latin typeface="Amiri" pitchFamily="2" charset="-78"/>
+                <a:ea typeface="Amiri" pitchFamily="2" charset="-78"/>
                 <a:cs typeface="Amiri" pitchFamily="2" charset="-78"/>
               </a:rPr>
               <a:t>خُطَّةُ الكِتَابَةِ</a:t>
@@ -7299,6 +7343,7 @@
                   <a:srgbClr val="1B3B6F"/>
                 </a:solidFill>
                 <a:latin typeface="Amiri" pitchFamily="2" charset="-78"/>
+                <a:ea typeface="Amiri" pitchFamily="2" charset="-78"/>
                 <a:cs typeface="Amiri" pitchFamily="2" charset="-78"/>
               </a:rPr>
               <a:t>يَقَعُ المَغْرِبُ فِي شَمَالِ إِفْرِيقْيَا.</a:t>
@@ -7398,6 +7443,7 @@
                   <a:srgbClr val="1B3B6F"/>
                 </a:solidFill>
                 <a:latin typeface="Amiri" pitchFamily="2" charset="-78"/>
+                <a:ea typeface="Amiri" pitchFamily="2" charset="-78"/>
                 <a:cs typeface="Amiri" pitchFamily="2" charset="-78"/>
               </a:rPr>
               <a:t>كَانَتِ الجِبَالُ عَالِيَةً، وَكَانَ الجَوُّ أَبْرَدَ مِنْ مَرَّاكُشَ.</a:t>
@@ -7497,6 +7543,7 @@
                   <a:srgbClr val="1B3B6F"/>
                 </a:solidFill>
                 <a:latin typeface="Amiri" pitchFamily="2" charset="-78"/>
+                <a:ea typeface="Amiri" pitchFamily="2" charset="-78"/>
                 <a:cs typeface="Amiri" pitchFamily="2" charset="-78"/>
               </a:rPr>
               <a:t>سَأُسَافِرُ بِالقِطَارِ، لِأَنَّهُ أَنْظَفُ لِلْبِيئَةِ.</a:t>
@@ -7658,6 +7705,7 @@
                   <a:srgbClr val="1F2A37"/>
                 </a:solidFill>
                 <a:latin typeface="Amiri" pitchFamily="2" charset="-78"/>
+                <a:ea typeface="Amiri" pitchFamily="2" charset="-78"/>
                 <a:cs typeface="Amiri" pitchFamily="2" charset="-78"/>
               </a:rPr>
               <a:t>أ</a:t>
@@ -7684,6 +7732,7 @@
                   <a:srgbClr val="1F2A37"/>
                 </a:solidFill>
                 <a:latin typeface="Amiri" pitchFamily="2" charset="-78"/>
+                <a:ea typeface="Amiri" pitchFamily="2" charset="-78"/>
                 <a:cs typeface="Amiri" pitchFamily="2" charset="-78"/>
               </a:rPr>
               <a:t>ب</a:t>
@@ -7830,6 +7879,7 @@
                   <a:srgbClr val="D4AF37"/>
                 </a:solidFill>
                 <a:latin typeface="Amiri" pitchFamily="2" charset="-78"/>
+                <a:ea typeface="Amiri" pitchFamily="2" charset="-78"/>
                 <a:cs typeface="Amiri" pitchFamily="2" charset="-78"/>
               </a:rPr>
               <a:t>م</a:t>
@@ -8087,6 +8137,7 @@
                   <a:srgbClr val="8A6D1E"/>
                 </a:solidFill>
                 <a:latin typeface="Amiri" pitchFamily="2" charset="-78"/>
+                <a:ea typeface="Amiri" pitchFamily="2" charset="-78"/>
                 <a:cs typeface="Amiri" pitchFamily="2" charset="-78"/>
               </a:rPr>
               <a:t>أ</a:t>
@@ -8151,6 +8202,7 @@
                   <a:srgbClr val="1B3B6F"/>
                 </a:solidFill>
                 <a:latin typeface="Amiri" pitchFamily="2" charset="-78"/>
+                <a:ea typeface="Amiri" pitchFamily="2" charset="-78"/>
                 <a:cs typeface="Amiri" pitchFamily="2" charset="-78"/>
               </a:rPr>
               <a:t>أ</a:t>
@@ -8202,6 +8254,7 @@
                   <a:srgbClr val="8A6D1E"/>
                 </a:solidFill>
                 <a:latin typeface="Amiri" pitchFamily="2" charset="-78"/>
+                <a:ea typeface="Amiri" pitchFamily="2" charset="-78"/>
                 <a:cs typeface="Amiri" pitchFamily="2" charset="-78"/>
               </a:rPr>
               <a:t>نَمُوذَجُ الإِجَابَةِ</a:t>
@@ -8315,6 +8368,7 @@
                   <a:srgbClr val="1F2A37"/>
                 </a:solidFill>
                 <a:latin typeface="Amiri" pitchFamily="2" charset="-78"/>
+                <a:ea typeface="Amiri" pitchFamily="2" charset="-78"/>
                 <a:cs typeface="Amiri" pitchFamily="2" charset="-78"/>
               </a:rPr>
               <a:t>فِي الصَّيْفِ المَاضِي سَافَرْتُ مَعَ أُسْرَتِي إِلَى المَغْرِبِ. يَقَعُ المَغْرِبُ فِي شَمَالِ إِفْرِيقْيَا، وَهُوَ بَلَدٌ جَمِيلٌ جِدًّا. حَجَزْنَا التَّذَاكِرَ وَالفُنْدُقَ عَلَى الإِنْتَرْنِتِ، وَسَافَرْنَا بِالطَّائِرَةِ ثَلَاثَ سَاعَاتٍ. أُرْسِلَتِ التَّذَاكِرُ إِلَى هَاتِفِ أُمِّي.</a:t>
@@ -8334,6 +8388,7 @@
                   <a:srgbClr val="1F2A37"/>
                 </a:solidFill>
                 <a:latin typeface="Amiri" pitchFamily="2" charset="-78"/>
+                <a:ea typeface="Amiri" pitchFamily="2" charset="-78"/>
                 <a:cs typeface="Amiri" pitchFamily="2" charset="-78"/>
               </a:rPr>
               <a:t>أَوَّلًا، زُرْنَا مَدِينَةَ مَرَّاكُشَ. كَانَ الجَوُّ حَارًّا جِدًّا، وَكَانَتْ دَرَجَةُ الحَرَارَةِ أَرْبَعِينَ دَرَجَةً. فِي المَدِينَةِ تُوجَدُ أَسْوَاقٌ قَدِيمَةٌ وَمَسَاجِدُ جَمِيلَةٌ. اشْتَرَيْتُ مِنَ السُّوقِ صُنْدُوقًا خَشَبِيًّا صَغِيرًا، وَكَانَ ثَمَنُهُ عَشَرَةَ جُنَيْهَاتٍ، وَهُوَ أَرْخَصُ مِنْ لَنْدَنَ بِكَثِيرٍ.</a:t>
@@ -8353,6 +8408,7 @@
                   <a:srgbClr val="1F2A37"/>
                 </a:solidFill>
                 <a:latin typeface="Amiri" pitchFamily="2" charset="-78"/>
+                <a:ea typeface="Amiri" pitchFamily="2" charset="-78"/>
                 <a:cs typeface="Amiri" pitchFamily="2" charset="-78"/>
               </a:rPr>
               <a:t>بَعْدَ ذٰلِكَ، ذَهَبْنَا إِلَى جِبَالِ الأَطْلَسِ. كَانَتِ الجِبَالُ عَالِيَةً، وَالوِدْيَانُ خَضْرَاءَ، وَكَانَ الجَوُّ أَبْرَدَ مِنْ مَرَّاكُشَ. لٰكِنْ رَأَيْتُ نُفَايَاتٍ بْلَاسْتِيكِيَّةً قُرْبَ النَّهْرِ، فَحَزِنْتُ كَثِيرًا، وَجَمَعْتُهَا مَعَ أَخِي.</a:t>
@@ -8372,6 +8428,7 @@
                   <a:srgbClr val="1F2A37"/>
                 </a:solidFill>
                 <a:latin typeface="Amiri" pitchFamily="2" charset="-78"/>
+                <a:ea typeface="Amiri" pitchFamily="2" charset="-78"/>
                 <a:cs typeface="Amiri" pitchFamily="2" charset="-78"/>
               </a:rPr>
               <a:t>فِي رَأْيِي، المَغْرِبُ بَلَدٌ رَائِعٌ، لٰكِنْ يَجِبُ أَنْ نَحْمِيَ طَبِيعَتَهُ. فِي المُسْتَقْبَلِ سَأَعُودُ إِلَى هُنَاكَ، وَسَأُسَافِرُ بِالقِطَارِ، لِأَنَّهُ أَنْظَفُ لِلْبِيئَةِ.</a:t>
@@ -8535,11 +8592,12 @@
               <a:buNone/>
             </a:pPr>
             <a:r>
-              <a:rPr lang="en-US" sz="950" b="1" dirty="0">
+              <a:rPr lang="ar-SA" sz="950" b="1" dirty="0">
                 <a:solidFill>
                   <a:srgbClr val="FFFFFF"/>
                 </a:solidFill>
                 <a:latin typeface="Calibri" pitchFamily="34" charset="0"/>
+                <a:ea typeface="Amiri" pitchFamily="2" charset="-78"/>
                 <a:cs typeface="Amiri" pitchFamily="2" charset="-78"/>
               </a:rPr>
               <a:t>يَقَعُ المَغْرِبُ</a:t>
@@ -8600,11 +8658,12 @@
               <a:buNone/>
             </a:pPr>
             <a:r>
-              <a:rPr lang="en-US" sz="950" b="1" dirty="0">
+              <a:rPr lang="ar-SA" sz="950" b="1" dirty="0">
                 <a:solidFill>
                   <a:srgbClr val="FFFFFF"/>
                 </a:solidFill>
                 <a:latin typeface="Calibri" pitchFamily="34" charset="0"/>
+                <a:ea typeface="Amiri" pitchFamily="2" charset="-78"/>
                 <a:cs typeface="Amiri" pitchFamily="2" charset="-78"/>
               </a:rPr>
               <a:t>تُوجَدُ أَسْوَاقٌ قَدِيمَةٌ</a:t>
@@ -8665,11 +8724,12 @@
               <a:buNone/>
             </a:pPr>
             <a:r>
-              <a:rPr lang="en-US" sz="950" b="1" dirty="0">
+              <a:rPr lang="ar-SA" sz="950" b="1" dirty="0">
                 <a:solidFill>
                   <a:srgbClr val="FFFFFF"/>
                 </a:solidFill>
                 <a:latin typeface="Calibri" pitchFamily="34" charset="0"/>
+                <a:ea typeface="Amiri" pitchFamily="2" charset="-78"/>
                 <a:cs typeface="Amiri" pitchFamily="2" charset="-78"/>
               </a:rPr>
               <a:t>كَانَتِ الجِبَالُ عَالِيَةً</a:t>
@@ -8730,11 +8790,12 @@
               <a:buNone/>
             </a:pPr>
             <a:r>
-              <a:rPr lang="en-US" sz="950" b="1" dirty="0">
+              <a:rPr lang="ar-SA" sz="950" b="1" dirty="0">
                 <a:solidFill>
                   <a:srgbClr val="FFFFFF"/>
                 </a:solidFill>
                 <a:latin typeface="Calibri" pitchFamily="34" charset="0"/>
+                <a:ea typeface="Amiri" pitchFamily="2" charset="-78"/>
                 <a:cs typeface="Amiri" pitchFamily="2" charset="-78"/>
               </a:rPr>
               <a:t>يَجِبُ أَنْ نَحْمِيَ</a:t>
@@ -8868,6 +8929,7 @@
                   <a:srgbClr val="D4AF37"/>
                 </a:solidFill>
                 <a:latin typeface="Amiri" pitchFamily="2" charset="-78"/>
+                <a:ea typeface="Amiri" pitchFamily="2" charset="-78"/>
                 <a:cs typeface="Amiri" pitchFamily="2" charset="-78"/>
               </a:rPr>
               <a:t>م</a:t>
@@ -9125,6 +9187,7 @@
                   <a:srgbClr val="8A6D1E"/>
                 </a:solidFill>
                 <a:latin typeface="Amiri" pitchFamily="2" charset="-78"/>
+                <a:ea typeface="Amiri" pitchFamily="2" charset="-78"/>
                 <a:cs typeface="Amiri" pitchFamily="2" charset="-78"/>
               </a:rPr>
               <a:t>أ</a:t>
@@ -9189,6 +9252,7 @@
                   <a:srgbClr val="1B3B6F"/>
                 </a:solidFill>
                 <a:latin typeface="Amiri" pitchFamily="2" charset="-78"/>
+                <a:ea typeface="Amiri" pitchFamily="2" charset="-78"/>
                 <a:cs typeface="Amiri" pitchFamily="2" charset="-78"/>
               </a:rPr>
               <a:t>أ</a:t>
@@ -9240,6 +9304,7 @@
                   <a:srgbClr val="8A6D1E"/>
                 </a:solidFill>
                 <a:latin typeface="Amiri" pitchFamily="2" charset="-78"/>
+                <a:ea typeface="Amiri" pitchFamily="2" charset="-78"/>
                 <a:cs typeface="Amiri" pitchFamily="2" charset="-78"/>
               </a:rPr>
               <a:t>نَمُوذَجُ الإِجَابَةِ</a:t>
@@ -9353,6 +9418,7 @@
                   <a:srgbClr val="1F2A37"/>
                 </a:solidFill>
                 <a:latin typeface="Amiri" pitchFamily="2" charset="-78"/>
+                <a:ea typeface="Amiri" pitchFamily="2" charset="-78"/>
                 <a:cs typeface="Amiri" pitchFamily="2" charset="-78"/>
               </a:rPr>
               <a:t>يَقُولُونَ إِنَّ السَّفَرَ يُعَلِّمُ مَا لَا تُعَلِّمُهُ الكُتُبُ، وَقَدْ عَرَفْتُ صِدْقَ هٰذَا القَوْلِ فِي رِحْلَتِي إِلَى المَغْرِبِ الصَّيْفَ المَاضِي؛ فَقَدْ نَظَّمْتُ مَعَ أَبِي كُلَّ شَيْءٍ بِأَنْفُسِنَا: قَارَنَّا الأَسْعَارَ، وَحَجَزْنَا بُيُوتًا تَقْلِيدِيَّةً بَدَلًا مِنَ الفَنَادِقِ الكَبِيرَةِ.</a:t>
@@ -9372,6 +9438,7 @@
                   <a:srgbClr val="1F2A37"/>
                 </a:solidFill>
                 <a:latin typeface="Amiri" pitchFamily="2" charset="-78"/>
+                <a:ea typeface="Amiri" pitchFamily="2" charset="-78"/>
                 <a:cs typeface="Amiri" pitchFamily="2" charset="-78"/>
               </a:rPr>
               <a:t>أَوَّلُ مَا أَدْهَشَنِي التَّنَوُّعُ؛ فَفِي أُسْبُوعٍ وَاحِدٍ انْتَقَلْنَا مِنْ حَرِّ مَرَّاكُشَ الَّذِي تَجَاوَزَ الأَرْبَعِينَ دَرَجَةً، إِلَى قِمَمِ الأَطْلَسِ الَّتِي تُغَطِّيهَا الثُّلُوجُ، ثُمَّ إِلَى شَوَاطِئِ الصُّوَيْرَةِ حَيْثُ تَهُبُّ الرِّيَاحُ القَوِيَّةُ طُولَ السَّنَةِ.</a:t>
@@ -9391,6 +9458,7 @@
                   <a:srgbClr val="1F2A37"/>
                 </a:solidFill>
                 <a:latin typeface="Amiri" pitchFamily="2" charset="-78"/>
+                <a:ea typeface="Amiri" pitchFamily="2" charset="-78"/>
                 <a:cs typeface="Amiri" pitchFamily="2" charset="-78"/>
               </a:rPr>
               <a:t>غَيْرَ أَنَّ أَكْثَرَ مَا بَقِيَ فِي ذَاكِرَتِي حِوَارٌ مَعَ شَابٍّ فِي قَرْيَةٍ جَبَلِيَّةٍ؛ فَقَدْ أَخْبَرَنِي أَنَّ النَّهْرَ الَّذِي كَانَ يَسْقِي حُقُولَهُمْ أَصْبَحَ يَجِفُّ كُلَّ صَيْفٍ، مِمَّا يَدْفَعُ الشَّبَابَ إِلَى الهِجْرَةِ إِلَى المُدُنِ.</a:t>
@@ -9410,6 +9478,7 @@
                   <a:srgbClr val="1F2A37"/>
                 </a:solidFill>
                 <a:latin typeface="Amiri" pitchFamily="2" charset="-78"/>
+                <a:ea typeface="Amiri" pitchFamily="2" charset="-78"/>
                 <a:cs typeface="Amiri" pitchFamily="2" charset="-78"/>
               </a:rPr>
               <a:t>صَحِيحٌ أَنَّ رِحْلَتِي كَانَتْ مُمْتِعَةً، غَيْرَ أَنَّهَا جَعَلَتْنِي أَرَى العَالَمَ بِعَيْنٍ مُخْتَلِفَةٍ. وَلَوْ سَافَرَ كُلُّ شَابٍّ وَاسْتَمَعَ إِلَى قِصَصِ النَّاسِ، لَفَهِمْنَا أَنَّ مَشَاكِلَ البِيئَةِ لَيْسَتْ أَرْقَامًا فِي الأَخْبَارِ، بَلْ حَيَاةُ بَشَرٍ حَقِيقِيِّينَ.</a:t>
@@ -9508,11 +9577,12 @@
               <a:buNone/>
             </a:pPr>
             <a:r>
-              <a:rPr lang="en-US" sz="950" b="1" dirty="0">
+              <a:rPr lang="ar-SA" sz="950" b="1" dirty="0">
                 <a:solidFill>
                   <a:srgbClr val="FFFFFF"/>
                 </a:solidFill>
                 <a:latin typeface="Calibri" pitchFamily="34" charset="0"/>
+                <a:ea typeface="Amiri" pitchFamily="2" charset="-78"/>
                 <a:cs typeface="Amiri" pitchFamily="2" charset="-78"/>
               </a:rPr>
               <a:t>يَقُولُونَ إِنَّ</a:t>
@@ -9573,11 +9643,12 @@
               <a:buNone/>
             </a:pPr>
             <a:r>
-              <a:rPr lang="en-US" sz="950" b="1" dirty="0">
+              <a:rPr lang="ar-SA" sz="950" b="1" dirty="0">
                 <a:solidFill>
                   <a:srgbClr val="FFFFFF"/>
                 </a:solidFill>
                 <a:latin typeface="Calibri" pitchFamily="34" charset="0"/>
+                <a:ea typeface="Amiri" pitchFamily="2" charset="-78"/>
                 <a:cs typeface="Amiri" pitchFamily="2" charset="-78"/>
               </a:rPr>
               <a:t>تَجَاوَزَ الأَرْبَعِينَ</a:t>
@@ -9638,11 +9709,12 @@
               <a:buNone/>
             </a:pPr>
             <a:r>
-              <a:rPr lang="en-US" sz="950" b="1" dirty="0">
+              <a:rPr lang="ar-SA" sz="950" b="1" dirty="0">
                 <a:solidFill>
                   <a:srgbClr val="FFFFFF"/>
                 </a:solidFill>
                 <a:latin typeface="Calibri" pitchFamily="34" charset="0"/>
+                <a:ea typeface="Amiri" pitchFamily="2" charset="-78"/>
                 <a:cs typeface="Amiri" pitchFamily="2" charset="-78"/>
               </a:rPr>
               <a:t>مِمَّا يَدْفَعُ</a:t>
@@ -9703,11 +9775,12 @@
               <a:buNone/>
             </a:pPr>
             <a:r>
-              <a:rPr lang="en-US" sz="950" b="1" dirty="0">
+              <a:rPr lang="ar-SA" sz="950" b="1" dirty="0">
                 <a:solidFill>
                   <a:srgbClr val="FFFFFF"/>
                 </a:solidFill>
                 <a:latin typeface="Calibri" pitchFamily="34" charset="0"/>
+                <a:ea typeface="Amiri" pitchFamily="2" charset="-78"/>
                 <a:cs typeface="Amiri" pitchFamily="2" charset="-78"/>
               </a:rPr>
               <a:t>لَوْ سَافَرَ … لَفَهِمْنَا</a:t>
@@ -9841,6 +9914,7 @@
                   <a:srgbClr val="D4AF37"/>
                 </a:solidFill>
                 <a:latin typeface="Amiri" pitchFamily="2" charset="-78"/>
+                <a:ea typeface="Amiri" pitchFamily="2" charset="-78"/>
                 <a:cs typeface="Amiri" pitchFamily="2" charset="-78"/>
               </a:rPr>
               <a:t>م</a:t>
@@ -10098,6 +10172,7 @@
                   <a:srgbClr val="8A6D1E"/>
                 </a:solidFill>
                 <a:latin typeface="Amiri" pitchFamily="2" charset="-78"/>
+                <a:ea typeface="Amiri" pitchFamily="2" charset="-78"/>
                 <a:cs typeface="Amiri" pitchFamily="2" charset="-78"/>
               </a:rPr>
               <a:t>ب</a:t>
@@ -10162,6 +10237,7 @@
                   <a:srgbClr val="1B3B6F"/>
                 </a:solidFill>
                 <a:latin typeface="Amiri" pitchFamily="2" charset="-78"/>
+                <a:ea typeface="Amiri" pitchFamily="2" charset="-78"/>
                 <a:cs typeface="Amiri" pitchFamily="2" charset="-78"/>
               </a:rPr>
               <a:t>ب</a:t>
@@ -10213,6 +10289,7 @@
                   <a:srgbClr val="8A6D1E"/>
                 </a:solidFill>
                 <a:latin typeface="Amiri" pitchFamily="2" charset="-78"/>
+                <a:ea typeface="Amiri" pitchFamily="2" charset="-78"/>
                 <a:cs typeface="Amiri" pitchFamily="2" charset="-78"/>
               </a:rPr>
               <a:t>نَمُوذَجُ الإِجَابَةِ</a:t>
@@ -10326,6 +10403,7 @@
                   <a:srgbClr val="1F2A37"/>
                 </a:solidFill>
                 <a:latin typeface="Amiri" pitchFamily="2" charset="-78"/>
+                <a:ea typeface="Amiri" pitchFamily="2" charset="-78"/>
                 <a:cs typeface="Amiri" pitchFamily="2" charset="-78"/>
               </a:rPr>
               <a:t>نَعِيشُ فِي عَالَمٍ مُتَّصِلٍ أَكْثَرَ مِنْ أَيِّ وَقْتٍ مَضَى؛ فَبِضَغْطَةِ زِرٍّ نَحْجِزُ رِحْلَةً إِلَى قَارَّةٍ أُخْرَى، وَنَشْتَرِي مَلَابِسَ مَصْنُوعَةً فِي آسْيَا، وَنَتَوَاصَلُ مَعَ أَصْدِقَاءَ فِي كُلِّ مَكَانٍ. فَهَلْ هٰذَا العَالَمُ المُتَّصِلُ نِعْمَةٌ أَمْ عِبْءٌ عَلَى الكَوْكَبِ؟</a:t>
@@ -10345,6 +10423,7 @@
                   <a:srgbClr val="1F2A37"/>
                 </a:solidFill>
                 <a:latin typeface="Amiri" pitchFamily="2" charset="-78"/>
+                <a:ea typeface="Amiri" pitchFamily="2" charset="-78"/>
                 <a:cs typeface="Amiri" pitchFamily="2" charset="-78"/>
               </a:rPr>
               <a:t>مِنْ نَاحِيَةٍ، قَرَّبَتِ التِّكْنُولُوجْيَا بَيْنَ الشُّعُوبِ، وَسَهَّلَتِ التَّعَلُّمَ وَالعَمَلَ عَنْ بُعْدٍ، مِمَّا قَلَّلَ مِنْ رِحْلَاتٍ كَثِيرَةٍ لَمْ تَعُدْ ضَرُورِيَّةً. وَمِنْ نَاحِيَةٍ أُخْرَى، شَجَّعَتْ عَلَى الاسْتِهْلَاكِ السَّرِيعِ، فَأَصْبَحْنَا نَشْتَرِي أَكْثَرَ، وَنَرْمِي أَكْثَرَ، وَنُسَافِرُ لِأَسْبَابٍ بَسِيطَةٍ.</a:t>
@@ -10364,6 +10443,7 @@
                   <a:srgbClr val="1F2A37"/>
                 </a:solidFill>
                 <a:latin typeface="Amiri" pitchFamily="2" charset="-78"/>
+                <a:ea typeface="Amiri" pitchFamily="2" charset="-78"/>
                 <a:cs typeface="Amiri" pitchFamily="2" charset="-78"/>
               </a:rPr>
               <a:t>وَقَدْ لَاحَظْتُ هٰذَا التَّنَاقُضَ فِي حَيَاتِي؛ فَفِي العَامِ المَاضِي شَارَكْتُ فِي مَشْرُوعٍ إِلِكْتْرُونِيٍّ مَعَ طُلَّابٍ مِنَ الأُرْدُنِّ لِقِيَاسِ دَرَجَاتِ الحَرَارَةِ فِي مَدِينَتَيْنَا، فَتَعَلَّمْتُ الكَثِيرَ دُونَ أَنْ أُسَافِرَ، بَيْنَمَا كَانَ بَعْضُ زُمَلَائِي يَطْلُبُونَ مَلَابِسَ جَدِيدَةً كُلَّ أُسْبُوعٍ.</a:t>
@@ -10383,6 +10463,7 @@
                   <a:srgbClr val="1F2A37"/>
                 </a:solidFill>
                 <a:latin typeface="Amiri" pitchFamily="2" charset="-78"/>
+                <a:ea typeface="Amiri" pitchFamily="2" charset="-78"/>
                 <a:cs typeface="Amiri" pitchFamily="2" charset="-78"/>
               </a:rPr>
               <a:t>صَحِيحٌ أَنَّ العَوْلَمَةَ لَنْ تَتَوَقَّفَ، غَيْرَ أَنَّنَا نَسْتَطِيعُ أَنْ نَخْتَارَ كَيْفَ نَسْتَخْدِمُهَا. وَإِذَا جَعَلْنَا التِّكْنُولُوجْيَا وَسِيلَةً لِلتَّعَلُّمِ وَالتَّعَاوُنِ لَا لِلِاسْتِهْلَاكِ، فَسَنَتْرُكُ لِلْأَجْيَالِ القَادِمَةِ عَالَمًا أَنْظَفَ وَأَعْدَلَ.</a:t>
@@ -10481,11 +10562,12 @@
               <a:buNone/>
             </a:pPr>
             <a:r>
-              <a:rPr lang="en-US" sz="950" b="1" dirty="0">
+              <a:rPr lang="ar-SA" sz="950" b="1" dirty="0">
                 <a:solidFill>
                   <a:srgbClr val="FFFFFF"/>
                 </a:solidFill>
                 <a:latin typeface="Calibri" pitchFamily="34" charset="0"/>
+                <a:ea typeface="Amiri" pitchFamily="2" charset="-78"/>
                 <a:cs typeface="Amiri" pitchFamily="2" charset="-78"/>
               </a:rPr>
               <a:t>أَكْثَرَ مِنْ أَيِّ وَقْتٍ مَضَى</a:t>
@@ -10546,11 +10628,12 @@
               <a:buNone/>
             </a:pPr>
             <a:r>
-              <a:rPr lang="en-US" sz="950" b="1" dirty="0">
+              <a:rPr lang="ar-SA" sz="950" b="1" dirty="0">
                 <a:solidFill>
                   <a:srgbClr val="FFFFFF"/>
                 </a:solidFill>
                 <a:latin typeface="Calibri" pitchFamily="34" charset="0"/>
+                <a:ea typeface="Amiri" pitchFamily="2" charset="-78"/>
                 <a:cs typeface="Amiri" pitchFamily="2" charset="-78"/>
               </a:rPr>
               <a:t>مِنْ نَاحِيَةٍ … وَمِنْ نَاحِيَةٍ أُخْرَى</a:t>
@@ -10611,11 +10694,12 @@
               <a:buNone/>
             </a:pPr>
             <a:r>
-              <a:rPr lang="en-US" sz="950" b="1" dirty="0">
+              <a:rPr lang="ar-SA" sz="950" b="1" dirty="0">
                 <a:solidFill>
                   <a:srgbClr val="FFFFFF"/>
                 </a:solidFill>
                 <a:latin typeface="Calibri" pitchFamily="34" charset="0"/>
+                <a:ea typeface="Amiri" pitchFamily="2" charset="-78"/>
                 <a:cs typeface="Amiri" pitchFamily="2" charset="-78"/>
               </a:rPr>
               <a:t>دُونَ أَنْ أُسَافِرَ</a:t>
@@ -10676,11 +10760,12 @@
               <a:buNone/>
             </a:pPr>
             <a:r>
-              <a:rPr lang="en-US" sz="950" b="1" dirty="0">
+              <a:rPr lang="ar-SA" sz="950" b="1" dirty="0">
                 <a:solidFill>
                   <a:srgbClr val="FFFFFF"/>
                 </a:solidFill>
                 <a:latin typeface="Calibri" pitchFamily="34" charset="0"/>
+                <a:ea typeface="Amiri" pitchFamily="2" charset="-78"/>
                 <a:cs typeface="Amiri" pitchFamily="2" charset="-78"/>
               </a:rPr>
               <a:t>إِذَا جَعَلْنَا … فَسَنَتْرُكُ</a:t>
@@ -10814,6 +10899,7 @@
                   <a:srgbClr val="D4AF37"/>
                 </a:solidFill>
                 <a:latin typeface="Amiri" pitchFamily="2" charset="-78"/>
+                <a:ea typeface="Amiri" pitchFamily="2" charset="-78"/>
                 <a:cs typeface="Amiri" pitchFamily="2" charset="-78"/>
               </a:rPr>
               <a:t>م</a:t>
@@ -11134,6 +11220,7 @@
                   <a:srgbClr val="8A6D1E"/>
                 </a:solidFill>
                 <a:latin typeface="Amiri" pitchFamily="2" charset="-78"/>
+                <a:ea typeface="Amiri" pitchFamily="2" charset="-78"/>
                 <a:cs typeface="Amiri" pitchFamily="2" charset="-78"/>
               </a:rPr>
               <a:t>قَيِّمْ عَمَلَكَ</a:t>
@@ -12378,6 +12465,7 @@
                   <a:srgbClr val="FFFFFF"/>
                 </a:solidFill>
                 <a:latin typeface="Amiri" pitchFamily="2" charset="-78"/>
+                <a:ea typeface="Amiri" pitchFamily="2" charset="-78"/>
                 <a:cs typeface="Amiri" pitchFamily="2" charset="-78"/>
               </a:rPr>
               <a:t>أَحْسَنْتُمْ! إِلَى اللِّقَاءِ</a:t>
@@ -12530,6 +12618,7 @@
                   <a:srgbClr val="D4AF37"/>
                 </a:solidFill>
                 <a:latin typeface="Amiri" pitchFamily="2" charset="-78"/>
+                <a:ea typeface="Amiri" pitchFamily="2" charset="-78"/>
                 <a:cs typeface="Amiri" pitchFamily="2" charset="-78"/>
               </a:rPr>
               <a:t>المِحْوَرُ التَّالِي</a:t>
@@ -12663,6 +12752,7 @@
                   <a:srgbClr val="D4AF37"/>
                 </a:solidFill>
                 <a:latin typeface="Amiri" pitchFamily="2" charset="-78"/>
+                <a:ea typeface="Amiri" pitchFamily="2" charset="-78"/>
                 <a:cs typeface="Amiri" pitchFamily="2" charset="-78"/>
               </a:rPr>
               <a:t>م</a:t>
@@ -12983,6 +13073,7 @@
                   <a:srgbClr val="8A6D1E"/>
                 </a:solidFill>
                 <a:latin typeface="Amiri" pitchFamily="2" charset="-78"/>
+                <a:ea typeface="Amiri" pitchFamily="2" charset="-78"/>
                 <a:cs typeface="Amiri" pitchFamily="2" charset="-78"/>
               </a:rPr>
               <a:t>آدَابُ الصَّفِّ</a:t>
@@ -14514,6 +14605,7 @@
                   <a:srgbClr val="D4AF37"/>
                 </a:solidFill>
                 <a:latin typeface="Amiri" pitchFamily="2" charset="-78"/>
+                <a:ea typeface="Amiri" pitchFamily="2" charset="-78"/>
                 <a:cs typeface="Amiri" pitchFamily="2" charset="-78"/>
               </a:rPr>
               <a:t>م</a:t>
@@ -14834,6 +14926,7 @@
                   <a:srgbClr val="8A6D1E"/>
                 </a:solidFill>
                 <a:latin typeface="Amiri" pitchFamily="2" charset="-78"/>
+                <a:ea typeface="Amiri" pitchFamily="2" charset="-78"/>
                 <a:cs typeface="Amiri" pitchFamily="2" charset="-78"/>
               </a:rPr>
               <a:t>خَرِيطَةُ الوَرْشَةِ</a:t>
@@ -15148,6 +15241,7 @@
                   <a:srgbClr val="1B3B6F"/>
                 </a:solidFill>
                 <a:latin typeface="Amiri" pitchFamily="2" charset="-78"/>
+                <a:ea typeface="Amiri" pitchFamily="2" charset="-78"/>
                 <a:cs typeface="Amiri" pitchFamily="2" charset="-78"/>
               </a:rPr>
               <a:t>كَيْفَ</a:t>
@@ -15424,6 +15518,7 @@
                   <a:srgbClr val="1E6B52"/>
                 </a:solidFill>
                 <a:latin typeface="Amiri" pitchFamily="2" charset="-78"/>
+                <a:ea typeface="Amiri" pitchFamily="2" charset="-78"/>
                 <a:cs typeface="Amiri" pitchFamily="2" charset="-78"/>
               </a:rPr>
               <a:t>الاسْتِمَارَةُ</a:t>
@@ -15700,6 +15795,7 @@
                   <a:srgbClr val="1E6B52"/>
                 </a:solidFill>
                 <a:latin typeface="Amiri" pitchFamily="2" charset="-78"/>
+                <a:ea typeface="Amiri" pitchFamily="2" charset="-78"/>
                 <a:cs typeface="Amiri" pitchFamily="2" charset="-78"/>
               </a:rPr>
               <a:t>الرِّسَالَةُ</a:t>
@@ -15976,6 +16072,7 @@
                   <a:srgbClr val="1E6B52"/>
                 </a:solidFill>
                 <a:latin typeface="Amiri" pitchFamily="2" charset="-78"/>
+                <a:ea typeface="Amiri" pitchFamily="2" charset="-78"/>
                 <a:cs typeface="Amiri" pitchFamily="2" charset="-78"/>
               </a:rPr>
               <a:t>المَقَالُ</a:t>
@@ -16252,6 +16349,7 @@
                   <a:srgbClr val="8A6D1E"/>
                 </a:solidFill>
                 <a:latin typeface="Amiri" pitchFamily="2" charset="-78"/>
+                <a:ea typeface="Amiri" pitchFamily="2" charset="-78"/>
                 <a:cs typeface="Amiri" pitchFamily="2" charset="-78"/>
               </a:rPr>
               <a:t>قَيِّمْ</a:t>
@@ -16495,6 +16593,7 @@
                   <a:srgbClr val="D4AF37"/>
                 </a:solidFill>
                 <a:latin typeface="Amiri" pitchFamily="2" charset="-78"/>
+                <a:ea typeface="Amiri" pitchFamily="2" charset="-78"/>
                 <a:cs typeface="Amiri" pitchFamily="2" charset="-78"/>
               </a:rPr>
               <a:t>م</a:t>
@@ -16815,6 +16914,7 @@
                   <a:srgbClr val="8A6D1E"/>
                 </a:solidFill>
                 <a:latin typeface="Amiri" pitchFamily="2" charset="-78"/>
+                <a:ea typeface="Amiri" pitchFamily="2" charset="-78"/>
                 <a:cs typeface="Amiri" pitchFamily="2" charset="-78"/>
               </a:rPr>
               <a:t>امْتِحَانُ الكِتَابَةِ</a:t>
@@ -17442,6 +17542,7 @@
                   <a:srgbClr val="1B3B6F"/>
                 </a:solidFill>
                 <a:latin typeface="Amiri" pitchFamily="2" charset="-78"/>
+                <a:ea typeface="Amiri" pitchFamily="2" charset="-78"/>
                 <a:cs typeface="Amiri" pitchFamily="2" charset="-78"/>
               </a:rPr>
               <a:t>بَيْتٌ تَقْلِيدِيٌّ حَجَزْنَاهُ عَلَى الإِنْتَرْنِتِ، جُدْرَانُهُ مَبْنِيَّةٌ مِنَ الحَجَرِ</a:t>
@@ -17541,6 +17642,7 @@
                   <a:srgbClr val="1B3B6F"/>
                 </a:solidFill>
                 <a:latin typeface="Amiri" pitchFamily="2" charset="-78"/>
+                <a:ea typeface="Amiri" pitchFamily="2" charset="-78"/>
                 <a:cs typeface="Amiri" pitchFamily="2" charset="-78"/>
               </a:rPr>
               <a:t>هَوَاؤُهَا أَنْظَفُ مِمَّا تَوَقَّعْتُ</a:t>
@@ -17640,6 +17742,7 @@
                   <a:srgbClr val="1B3B6F"/>
                 </a:solidFill>
                 <a:latin typeface="Amiri" pitchFamily="2" charset="-78"/>
+                <a:ea typeface="Amiri" pitchFamily="2" charset="-78"/>
                 <a:cs typeface="Amiri" pitchFamily="2" charset="-78"/>
               </a:rPr>
               <a:t>مِمَّا يَدْفَعُ الشَّبَابَ إِلَى الهِجْرَةِ</a:t>
@@ -17811,6 +17914,7 @@
                   <a:srgbClr val="D4AF37"/>
                 </a:solidFill>
                 <a:latin typeface="Amiri" pitchFamily="2" charset="-78"/>
+                <a:ea typeface="Amiri" pitchFamily="2" charset="-78"/>
                 <a:cs typeface="Amiri" pitchFamily="2" charset="-78"/>
               </a:rPr>
               <a:t>م</a:t>
@@ -18131,6 +18235,7 @@
                   <a:srgbClr val="8A6D1E"/>
                 </a:solidFill>
                 <a:latin typeface="Amiri" pitchFamily="2" charset="-78"/>
+                <a:ea typeface="Amiri" pitchFamily="2" charset="-78"/>
                 <a:cs typeface="Amiri" pitchFamily="2" charset="-78"/>
               </a:rPr>
               <a:t>اسْتِمَارَةُ حَجْزِ رِحْلَةٍ</a:t>
@@ -18487,6 +18592,7 @@
                   <a:srgbClr val="1B3B6F"/>
                 </a:solidFill>
                 <a:latin typeface="Amiri" pitchFamily="2" charset="-78"/>
+                <a:ea typeface="Amiri" pitchFamily="2" charset="-78"/>
                 <a:cs typeface="Amiri" pitchFamily="2" charset="-78"/>
               </a:rPr>
               <a:t>الاسْمُ وَالجِنْسِيَّةُ</a:t>
@@ -18731,6 +18837,7 @@
                   <a:srgbClr val="1B3B6F"/>
                 </a:solidFill>
                 <a:latin typeface="Amiri" pitchFamily="2" charset="-78"/>
+                <a:ea typeface="Amiri" pitchFamily="2" charset="-78"/>
                 <a:cs typeface="Amiri" pitchFamily="2" charset="-78"/>
               </a:rPr>
               <a:t>الوِجْهَةُ</a:t>
@@ -18975,6 +19082,7 @@
                   <a:srgbClr val="1B3B6F"/>
                 </a:solidFill>
                 <a:latin typeface="Amiri" pitchFamily="2" charset="-78"/>
+                <a:ea typeface="Amiri" pitchFamily="2" charset="-78"/>
                 <a:cs typeface="Amiri" pitchFamily="2" charset="-78"/>
               </a:rPr>
               <a:t>تَارِيخُ السَّفَرِ</a:t>
@@ -19219,6 +19327,7 @@
                   <a:srgbClr val="1B3B6F"/>
                 </a:solidFill>
                 <a:latin typeface="Amiri" pitchFamily="2" charset="-78"/>
+                <a:ea typeface="Amiri" pitchFamily="2" charset="-78"/>
                 <a:cs typeface="Amiri" pitchFamily="2" charset="-78"/>
               </a:rPr>
               <a:t>عَدَدُ المُسَافِرِينَ</a:t>
@@ -19463,6 +19572,7 @@
                   <a:srgbClr val="1B3B6F"/>
                 </a:solidFill>
                 <a:latin typeface="Amiri" pitchFamily="2" charset="-78"/>
+                <a:ea typeface="Amiri" pitchFamily="2" charset="-78"/>
                 <a:cs typeface="Amiri" pitchFamily="2" charset="-78"/>
               </a:rPr>
               <a:t>نَوْعُ السَّكَنِ</a:t>
@@ -19707,6 +19817,7 @@
                   <a:srgbClr val="1B3B6F"/>
                 </a:solidFill>
                 <a:latin typeface="Amiri" pitchFamily="2" charset="-78"/>
+                <a:ea typeface="Amiri" pitchFamily="2" charset="-78"/>
                 <a:cs typeface="Amiri" pitchFamily="2" charset="-78"/>
               </a:rPr>
               <a:t>وَسِيلَةُ المُوَاصَلَاتِ</a:t>
@@ -19951,6 +20062,7 @@
                   <a:srgbClr val="1B3B6F"/>
                 </a:solidFill>
                 <a:latin typeface="Amiri" pitchFamily="2" charset="-78"/>
+                <a:ea typeface="Amiri" pitchFamily="2" charset="-78"/>
                 <a:cs typeface="Amiri" pitchFamily="2" charset="-78"/>
               </a:rPr>
               <a:t>المِيزَانِيَّةُ</a:t>
@@ -20130,6 +20242,7 @@
                   <a:srgbClr val="1B3B6F"/>
                 </a:solidFill>
                 <a:latin typeface="Amiri" pitchFamily="2" charset="-78"/>
+                <a:ea typeface="Amiri" pitchFamily="2" charset="-78"/>
                 <a:cs typeface="Amiri" pitchFamily="2" charset="-78"/>
               </a:rPr>
               <a:t>جُمْلَةٌ: لِمَاذَا اخْتَرْتَ هٰذِهِ الوِجْهَةَ؟</a:t>
@@ -20339,6 +20452,7 @@
                   <a:srgbClr val="D4AF37"/>
                 </a:solidFill>
                 <a:latin typeface="Amiri" pitchFamily="2" charset="-78"/>
+                <a:ea typeface="Amiri" pitchFamily="2" charset="-78"/>
                 <a:cs typeface="Amiri" pitchFamily="2" charset="-78"/>
               </a:rPr>
               <a:t>م</a:t>
@@ -20659,6 +20773,7 @@
                   <a:srgbClr val="8A6D1E"/>
                 </a:solidFill>
                 <a:latin typeface="Amiri" pitchFamily="2" charset="-78"/>
+                <a:ea typeface="Amiri" pitchFamily="2" charset="-78"/>
                 <a:cs typeface="Amiri" pitchFamily="2" charset="-78"/>
               </a:rPr>
               <a:t>نَمُوذَجُ الإِجَابَةِ</a:t>
@@ -20977,6 +21092,7 @@
                   <a:srgbClr val="1B3B6F"/>
                 </a:solidFill>
                 <a:latin typeface="Amiri" pitchFamily="2" charset="-78"/>
+                <a:ea typeface="Amiri" pitchFamily="2" charset="-78"/>
                 <a:cs typeface="Amiri" pitchFamily="2" charset="-78"/>
               </a:rPr>
               <a:t>هُدَى أَحْمَدُ، بَرِيطَانِيَّةٌ</a:t>
@@ -21015,6 +21131,7 @@
                   <a:srgbClr val="1B3B6F"/>
                 </a:solidFill>
                 <a:latin typeface="Amiri" pitchFamily="2" charset="-78"/>
+                <a:ea typeface="Amiri" pitchFamily="2" charset="-78"/>
                 <a:cs typeface="Amiri" pitchFamily="2" charset="-78"/>
               </a:rPr>
               <a:t>الاسْمُ وَالجِنْسِيَّةُ</a:t>
@@ -21156,6 +21273,7 @@
                   <a:srgbClr val="1B3B6F"/>
                 </a:solidFill>
                 <a:latin typeface="Amiri" pitchFamily="2" charset="-78"/>
+                <a:ea typeface="Amiri" pitchFamily="2" charset="-78"/>
                 <a:cs typeface="Amiri" pitchFamily="2" charset="-78"/>
               </a:rPr>
               <a:t>فَاسُ، المَغْرِبُ</a:t>
@@ -21194,6 +21312,7 @@
                   <a:srgbClr val="1B3B6F"/>
                 </a:solidFill>
                 <a:latin typeface="Amiri" pitchFamily="2" charset="-78"/>
+                <a:ea typeface="Amiri" pitchFamily="2" charset="-78"/>
                 <a:cs typeface="Amiri" pitchFamily="2" charset="-78"/>
               </a:rPr>
               <a:t>الوِجْهَةُ</a:t>
@@ -21335,6 +21454,7 @@
                   <a:srgbClr val="1B3B6F"/>
                 </a:solidFill>
                 <a:latin typeface="Amiri" pitchFamily="2" charset="-78"/>
+                <a:ea typeface="Amiri" pitchFamily="2" charset="-78"/>
                 <a:cs typeface="Amiri" pitchFamily="2" charset="-78"/>
               </a:rPr>
               <a:t>١٥ يُولْيُو</a:t>
@@ -21373,6 +21493,7 @@
                   <a:srgbClr val="1B3B6F"/>
                 </a:solidFill>
                 <a:latin typeface="Amiri" pitchFamily="2" charset="-78"/>
+                <a:ea typeface="Amiri" pitchFamily="2" charset="-78"/>
                 <a:cs typeface="Amiri" pitchFamily="2" charset="-78"/>
               </a:rPr>
               <a:t>تَارِيخُ السَّفَرِ</a:t>
@@ -21514,6 +21635,7 @@
                   <a:srgbClr val="1B3B6F"/>
                 </a:solidFill>
                 <a:latin typeface="Amiri" pitchFamily="2" charset="-78"/>
+                <a:ea typeface="Amiri" pitchFamily="2" charset="-78"/>
                 <a:cs typeface="Amiri" pitchFamily="2" charset="-78"/>
               </a:rPr>
               <a:t>أَرْبَعَةٌ</a:t>
@@ -21552,6 +21674,7 @@
                   <a:srgbClr val="1B3B6F"/>
                 </a:solidFill>
                 <a:latin typeface="Amiri" pitchFamily="2" charset="-78"/>
+                <a:ea typeface="Amiri" pitchFamily="2" charset="-78"/>
                 <a:cs typeface="Amiri" pitchFamily="2" charset="-78"/>
               </a:rPr>
               <a:t>عَدَدُ المُسَافِرِينَ</a:t>
@@ -21693,6 +21816,7 @@
                   <a:srgbClr val="1B3B6F"/>
                 </a:solidFill>
                 <a:latin typeface="Amiri" pitchFamily="2" charset="-78"/>
+                <a:ea typeface="Amiri" pitchFamily="2" charset="-78"/>
                 <a:cs typeface="Amiri" pitchFamily="2" charset="-78"/>
               </a:rPr>
               <a:t>بَيْتٌ تَقْلِيدِيٌّ</a:t>
@@ -21731,6 +21855,7 @@
                   <a:srgbClr val="1B3B6F"/>
                 </a:solidFill>
                 <a:latin typeface="Amiri" pitchFamily="2" charset="-78"/>
+                <a:ea typeface="Amiri" pitchFamily="2" charset="-78"/>
                 <a:cs typeface="Amiri" pitchFamily="2" charset="-78"/>
               </a:rPr>
               <a:t>نَوْعُ السَّكَنِ</a:t>
@@ -21872,6 +21997,7 @@
                   <a:srgbClr val="1B3B6F"/>
                 </a:solidFill>
                 <a:latin typeface="Amiri" pitchFamily="2" charset="-78"/>
+                <a:ea typeface="Amiri" pitchFamily="2" charset="-78"/>
                 <a:cs typeface="Amiri" pitchFamily="2" charset="-78"/>
               </a:rPr>
               <a:t>القِطَارُ</a:t>
@@ -21910,6 +22036,7 @@
                   <a:srgbClr val="1B3B6F"/>
                 </a:solidFill>
                 <a:latin typeface="Amiri" pitchFamily="2" charset="-78"/>
+                <a:ea typeface="Amiri" pitchFamily="2" charset="-78"/>
                 <a:cs typeface="Amiri" pitchFamily="2" charset="-78"/>
               </a:rPr>
               <a:t>وَسِيلَةُ المُوَاصَلَاتِ</a:t>
@@ -22051,6 +22178,7 @@
                   <a:srgbClr val="1B3B6F"/>
                 </a:solidFill>
                 <a:latin typeface="Amiri" pitchFamily="2" charset="-78"/>
+                <a:ea typeface="Amiri" pitchFamily="2" charset="-78"/>
                 <a:cs typeface="Amiri" pitchFamily="2" charset="-78"/>
               </a:rPr>
               <a:t>خَمْسُمِئَةِ جُنَيْهٍ</a:t>
@@ -22089,6 +22217,7 @@
                   <a:srgbClr val="1B3B6F"/>
                 </a:solidFill>
                 <a:latin typeface="Amiri" pitchFamily="2" charset="-78"/>
+                <a:ea typeface="Amiri" pitchFamily="2" charset="-78"/>
                 <a:cs typeface="Amiri" pitchFamily="2" charset="-78"/>
               </a:rPr>
               <a:t>المِيزَانِيَّةُ</a:t>
@@ -22233,6 +22362,7 @@
                   <a:srgbClr val="1B3B6F"/>
                 </a:solidFill>
                 <a:latin typeface="Amiri" pitchFamily="2" charset="-78"/>
+                <a:ea typeface="Amiri" pitchFamily="2" charset="-78"/>
                 <a:cs typeface="Amiri" pitchFamily="2" charset="-78"/>
               </a:rPr>
               <a:t>اخْتَرْتُهَا لِأَنَّ فِيهَا مَدِينَةً قَدِيمَةً لَا تَدْخُلُهَا السَّيَّارَاتُ، وَجِبَالًا عَالِيَةً قَرِيبَةً.</a:t>
@@ -22271,6 +22401,7 @@
                   <a:srgbClr val="1B3B6F"/>
                 </a:solidFill>
                 <a:latin typeface="Amiri" pitchFamily="2" charset="-78"/>
+                <a:ea typeface="Amiri" pitchFamily="2" charset="-78"/>
                 <a:cs typeface="Amiri" pitchFamily="2" charset="-78"/>
               </a:rPr>
               <a:t>جُمْلَةٌ: لِمَاذَا اخْتَرْتَ هٰذِهِ الوِجْهَةَ؟</a:t>
@@ -22480,6 +22611,7 @@
                   <a:srgbClr val="D4AF37"/>
                 </a:solidFill>
                 <a:latin typeface="Amiri" pitchFamily="2" charset="-78"/>
+                <a:ea typeface="Amiri" pitchFamily="2" charset="-78"/>
                 <a:cs typeface="Amiri" pitchFamily="2" charset="-78"/>
               </a:rPr>
               <a:t>م</a:t>
@@ -22800,6 +22932,7 @@
                   <a:srgbClr val="8A6D1E"/>
                 </a:solidFill>
                 <a:latin typeface="Amiri" pitchFamily="2" charset="-78"/>
+                <a:ea typeface="Amiri" pitchFamily="2" charset="-78"/>
                 <a:cs typeface="Amiri" pitchFamily="2" charset="-78"/>
               </a:rPr>
               <a:t>رِسَالَةٌ مِنَ السَّفَرِ</a:t>
@@ -23275,6 +23408,7 @@
                   <a:srgbClr val="1B3B6F"/>
                 </a:solidFill>
                 <a:latin typeface="Amiri" pitchFamily="2" charset="-78"/>
+                <a:ea typeface="Amiri" pitchFamily="2" charset="-78"/>
                 <a:cs typeface="Amiri" pitchFamily="2" charset="-78"/>
               </a:rPr>
               <a:t>حَجَزْنَا … وَهِيَ مَبْنِيَّةٌ مِنْ …</a:t>
@@ -23351,6 +23485,7 @@
                   <a:srgbClr val="1B3B6F"/>
                 </a:solidFill>
                 <a:latin typeface="Amiri" pitchFamily="2" charset="-78"/>
+                <a:ea typeface="Amiri" pitchFamily="2" charset="-78"/>
                 <a:cs typeface="Amiri" pitchFamily="2" charset="-78"/>
               </a:rPr>
               <a:t>الجَوُّ … وَهُوَ أَحَرُّ مِنْ …</a:t>
@@ -23427,6 +23562,7 @@
                   <a:srgbClr val="1B3B6F"/>
                 </a:solidFill>
                 <a:latin typeface="Amiri" pitchFamily="2" charset="-78"/>
+                <a:ea typeface="Amiri" pitchFamily="2" charset="-78"/>
                 <a:cs typeface="Amiri" pitchFamily="2" charset="-78"/>
               </a:rPr>
               <a:t>أَمْسِ اشْتَرَيْتُ … وَكَانَ ثَمَنُهَا …</a:t>
@@ -23503,6 +23639,7 @@
                   <a:srgbClr val="1B3B6F"/>
                 </a:solidFill>
                 <a:latin typeface="Amiri" pitchFamily="2" charset="-78"/>
+                <a:ea typeface="Amiri" pitchFamily="2" charset="-78"/>
                 <a:cs typeface="Amiri" pitchFamily="2" charset="-78"/>
               </a:rPr>
               <a:t>غَدًا سَنَزُورُ … وَسَأُرْسِلُ …</a:t>
@@ -23674,6 +23811,7 @@
                   <a:srgbClr val="D4AF37"/>
                 </a:solidFill>
                 <a:latin typeface="Amiri" pitchFamily="2" charset="-78"/>
+                <a:ea typeface="Amiri" pitchFamily="2" charset="-78"/>
                 <a:cs typeface="Amiri" pitchFamily="2" charset="-78"/>
               </a:rPr>
               <a:t>م</a:t>
@@ -23994,6 +24132,7 @@
                   <a:srgbClr val="8A6D1E"/>
                 </a:solidFill>
                 <a:latin typeface="Amiri" pitchFamily="2" charset="-78"/>
+                <a:ea typeface="Amiri" pitchFamily="2" charset="-78"/>
                 <a:cs typeface="Amiri" pitchFamily="2" charset="-78"/>
               </a:rPr>
               <a:t>نَصُّ السُّؤَالِ</a:t>
@@ -24274,6 +24413,7 @@
                   <a:srgbClr val="1B3B6F"/>
                 </a:solidFill>
                 <a:latin typeface="Amiri" pitchFamily="2" charset="-78"/>
+                <a:ea typeface="Amiri" pitchFamily="2" charset="-78"/>
                 <a:cs typeface="Amiri" pitchFamily="2" charset="-78"/>
               </a:rPr>
               <a:t>أَنْتِ فِي عُطْلَةٍ خَارِجَ بِلَادِكِ. اكْتُبِي رِسَالَةً إِلَى صَدِيقَتِكِ (٨٠–٩٠ كَلِمَةً).</a:t>
@@ -24415,6 +24555,7 @@
                   <a:srgbClr val="1B3B6F"/>
                 </a:solidFill>
                 <a:latin typeface="Amiri" pitchFamily="2" charset="-78"/>
+                <a:ea typeface="Amiri" pitchFamily="2" charset="-78"/>
                 <a:cs typeface="Amiri" pitchFamily="2" charset="-78"/>
               </a:rPr>
               <a:t>أَيْنَ تُقِيمِينَ؟ وَكَيْفَ المَكَانُ؟</a:t>
@@ -24556,6 +24697,7 @@
                   <a:srgbClr val="1B3B6F"/>
                 </a:solidFill>
                 <a:latin typeface="Amiri" pitchFamily="2" charset="-78"/>
+                <a:ea typeface="Amiri" pitchFamily="2" charset="-78"/>
                 <a:cs typeface="Amiri" pitchFamily="2" charset="-78"/>
               </a:rPr>
               <a:t>كَيْفَ الطَّقْسُ؟ قَارِنِيهِ بِطَقْسِ بَلَدِكِ.</a:t>
@@ -24697,6 +24839,7 @@
                   <a:srgbClr val="1B3B6F"/>
                 </a:solidFill>
                 <a:latin typeface="Amiri" pitchFamily="2" charset="-78"/>
+                <a:ea typeface="Amiri" pitchFamily="2" charset="-78"/>
                 <a:cs typeface="Amiri" pitchFamily="2" charset="-78"/>
               </a:rPr>
               <a:t>مَاذَا اشْتَرَيْتِ أَوْ فَعَلْتِ أَمْسِ؟</a:t>
@@ -24838,6 +24981,7 @@
                   <a:srgbClr val="1B3B6F"/>
                 </a:solidFill>
                 <a:latin typeface="Amiri" pitchFamily="2" charset="-78"/>
+                <a:ea typeface="Amiri" pitchFamily="2" charset="-78"/>
                 <a:cs typeface="Amiri" pitchFamily="2" charset="-78"/>
               </a:rPr>
               <a:t>مَا رَأْيُكِ؟ وَمَاذَا سَتَفْعَلِينَ غَدًا؟</a:t>
@@ -25047,6 +25191,7 @@
                   <a:srgbClr val="D4AF37"/>
                 </a:solidFill>
                 <a:latin typeface="Amiri" pitchFamily="2" charset="-78"/>
+                <a:ea typeface="Amiri" pitchFamily="2" charset="-78"/>
                 <a:cs typeface="Amiri" pitchFamily="2" charset="-78"/>
               </a:rPr>
               <a:t>م</a:t>
@@ -25367,6 +25512,7 @@
                   <a:srgbClr val="8A6D1E"/>
                 </a:solidFill>
                 <a:latin typeface="Amiri" pitchFamily="2" charset="-78"/>
+                <a:ea typeface="Amiri" pitchFamily="2" charset="-78"/>
                 <a:cs typeface="Amiri" pitchFamily="2" charset="-78"/>
               </a:rPr>
               <a:t>قَوَالِبُ الكِتَابَةِ</a:t>
@@ -25647,6 +25793,7 @@
                   <a:srgbClr val="1B3B6F"/>
                 </a:solidFill>
                 <a:latin typeface="Amiri" pitchFamily="2" charset="-78"/>
+                <a:ea typeface="Amiri" pitchFamily="2" charset="-78"/>
                 <a:cs typeface="Amiri" pitchFamily="2" charset="-78"/>
               </a:rPr>
               <a:t>مَرْحَبًا يَا ______ ، كَيْفَ حَالُكِ؟</a:t>
@@ -25853,6 +26000,7 @@
                   <a:srgbClr val="1B3B6F"/>
                 </a:solidFill>
                 <a:latin typeface="Amiri" pitchFamily="2" charset="-78"/>
+                <a:ea typeface="Amiri" pitchFamily="2" charset="-78"/>
                 <a:cs typeface="Amiri" pitchFamily="2" charset="-78"/>
               </a:rPr>
               <a:t>أَنَا الآنَ فِي ______ . حَجَزْنَا ______ ، وَهِيَ مَبْنِيَّةٌ مِنْ ______ .</a:t>
@@ -26059,6 +26207,7 @@
                   <a:srgbClr val="1B3B6F"/>
                 </a:solidFill>
                 <a:latin typeface="Amiri" pitchFamily="2" charset="-78"/>
+                <a:ea typeface="Amiri" pitchFamily="2" charset="-78"/>
                 <a:cs typeface="Amiri" pitchFamily="2" charset="-78"/>
               </a:rPr>
               <a:t>الجَوُّ ______ ، وَهُوَ أَ______ مِنْ جَوِّ ______ .</a:t>
@@ -26265,6 +26414,7 @@
                   <a:srgbClr val="1B3B6F"/>
                 </a:solidFill>
                 <a:latin typeface="Amiri" pitchFamily="2" charset="-78"/>
+                <a:ea typeface="Amiri" pitchFamily="2" charset="-78"/>
                 <a:cs typeface="Amiri" pitchFamily="2" charset="-78"/>
               </a:rPr>
               <a:t>أَمْسِ اشْتَرَيْتُ ______ ، وَكَانَ ثَمَنُهَا ______ .</a:t>
@@ -26471,6 +26621,7 @@
                   <a:srgbClr val="1B3B6F"/>
                 </a:solidFill>
                 <a:latin typeface="Amiri" pitchFamily="2" charset="-78"/>
+                <a:ea typeface="Amiri" pitchFamily="2" charset="-78"/>
                 <a:cs typeface="Amiri" pitchFamily="2" charset="-78"/>
               </a:rPr>
               <a:t>فِي رَأْيِي ______ . غَدًا سَنَزُورُ ______ .</a:t>
@@ -26677,6 +26828,7 @@
                   <a:srgbClr val="1B3B6F"/>
                 </a:solidFill>
                 <a:latin typeface="Amiri" pitchFamily="2" charset="-78"/>
+                <a:ea typeface="Amiri" pitchFamily="2" charset="-78"/>
                 <a:cs typeface="Amiri" pitchFamily="2" charset="-78"/>
               </a:rPr>
               <a:t>مَعَ السَّلَامَةِ، ______</a:t>
@@ -26916,13 +27068,9 @@
     <a:fontScheme name="Office">
       <a:majorFont>
         <a:latin typeface="Calibri Light" panose="020F0302020204030204"/>
-        <a:ea typeface=""/>
-        <a:cs typeface=""/>
-        <a:font script="Jpan" typeface="游ゴシック Light"/>
-        <a:font script="Hang" typeface="맑은 고딕"/>
-        <a:font script="Hans" typeface="等线 Light"/>
-        <a:font script="Hant" typeface="新細明體"/>
-        <a:font script="Arab" typeface="Times New Roman"/>
+        <a:ea typeface="Amiri" pitchFamily="2" charset="-78"/>
+        <a:cs typeface="Amiri" pitchFamily="2" charset="-78"/>
+        <a:font script="Arab" typeface="Amiri"/>
         <a:font script="Hebr" typeface="Times New Roman"/>
         <a:font script="Thai" typeface="Angsana New"/>
         <a:font script="Ethi" typeface="Nyala"/>
@@ -26968,13 +27116,9 @@
       </a:majorFont>
       <a:minorFont>
         <a:latin typeface="Calibri" panose="020F0502020204030204"/>
-        <a:ea typeface=""/>
-        <a:cs typeface=""/>
-        <a:font script="Jpan" typeface="游ゴシック"/>
-        <a:font script="Hang" typeface="맑은 고딕"/>
-        <a:font script="Hans" typeface="等线"/>
-        <a:font script="Hant" typeface="新細明體"/>
-        <a:font script="Arab" typeface="Arial"/>
+        <a:ea typeface="Amiri" pitchFamily="2" charset="-78"/>
+        <a:cs typeface="Amiri" pitchFamily="2" charset="-78"/>
+        <a:font script="Arab" typeface="Amiri"/>
         <a:font script="Hebr" typeface="Arial"/>
         <a:font script="Thai" typeface="Cordia New"/>
         <a:font script="Ethi" typeface="Nyala"/>

--- a/Topic_C/Exam_Practice/TC-L12_Writing_Workshop_Review_Four_Skills_Assessment.pptx
+++ b/Topic_C/Exam_Practice/TC-L12_Writing_Workshop_Review_Four_Skills_Assessment.pptx
@@ -3848,7 +3848,7 @@
                 <a:solidFill>
                   <a:srgbClr val="FFFFFF"/>
                 </a:solidFill>
-                <a:latin typeface="Calibri" pitchFamily="34" charset="0"/>
+                <a:latin typeface="Amiri" pitchFamily="2" charset="-78"/>
                 <a:ea typeface="Amiri" pitchFamily="2" charset="-78"/>
                 <a:cs typeface="Amiri" pitchFamily="2" charset="-78"/>
               </a:rPr>
@@ -3914,7 +3914,7 @@
                 <a:solidFill>
                   <a:srgbClr val="FFFFFF"/>
                 </a:solidFill>
-                <a:latin typeface="Calibri" pitchFamily="34" charset="0"/>
+                <a:latin typeface="Amiri" pitchFamily="2" charset="-78"/>
                 <a:ea typeface="Amiri" pitchFamily="2" charset="-78"/>
                 <a:cs typeface="Amiri" pitchFamily="2" charset="-78"/>
               </a:rPr>
@@ -3980,7 +3980,7 @@
                 <a:solidFill>
                   <a:srgbClr val="FFFFFF"/>
                 </a:solidFill>
-                <a:latin typeface="Calibri" pitchFamily="34" charset="0"/>
+                <a:latin typeface="Amiri" pitchFamily="2" charset="-78"/>
                 <a:ea typeface="Amiri" pitchFamily="2" charset="-78"/>
                 <a:cs typeface="Amiri" pitchFamily="2" charset="-78"/>
               </a:rPr>
@@ -4046,7 +4046,7 @@
                 <a:solidFill>
                   <a:srgbClr val="FFFFFF"/>
                 </a:solidFill>
-                <a:latin typeface="Calibri" pitchFamily="34" charset="0"/>
+                <a:latin typeface="Amiri" pitchFamily="2" charset="-78"/>
                 <a:ea typeface="Amiri" pitchFamily="2" charset="-78"/>
                 <a:cs typeface="Amiri" pitchFamily="2" charset="-78"/>
               </a:rPr>
@@ -4844,7 +4844,7 @@
                 <a:solidFill>
                   <a:srgbClr val="FFFFFF"/>
                 </a:solidFill>
-                <a:latin typeface="Calibri" pitchFamily="34" charset="0"/>
+                <a:latin typeface="Amiri" pitchFamily="2" charset="-78"/>
                 <a:ea typeface="Amiri" pitchFamily="2" charset="-78"/>
                 <a:cs typeface="Amiri" pitchFamily="2" charset="-78"/>
               </a:rPr>
@@ -4910,7 +4910,7 @@
                 <a:solidFill>
                   <a:srgbClr val="FFFFFF"/>
                 </a:solidFill>
-                <a:latin typeface="Calibri" pitchFamily="34" charset="0"/>
+                <a:latin typeface="Amiri" pitchFamily="2" charset="-78"/>
                 <a:ea typeface="Amiri" pitchFamily="2" charset="-78"/>
                 <a:cs typeface="Amiri" pitchFamily="2" charset="-78"/>
               </a:rPr>
@@ -4976,7 +4976,7 @@
                 <a:solidFill>
                   <a:srgbClr val="FFFFFF"/>
                 </a:solidFill>
-                <a:latin typeface="Calibri" pitchFamily="34" charset="0"/>
+                <a:latin typeface="Amiri" pitchFamily="2" charset="-78"/>
                 <a:ea typeface="Amiri" pitchFamily="2" charset="-78"/>
                 <a:cs typeface="Amiri" pitchFamily="2" charset="-78"/>
               </a:rPr>
@@ -5042,7 +5042,7 @@
                 <a:solidFill>
                   <a:srgbClr val="FFFFFF"/>
                 </a:solidFill>
-                <a:latin typeface="Calibri" pitchFamily="34" charset="0"/>
+                <a:latin typeface="Amiri" pitchFamily="2" charset="-78"/>
                 <a:ea typeface="Amiri" pitchFamily="2" charset="-78"/>
                 <a:cs typeface="Amiri" pitchFamily="2" charset="-78"/>
               </a:rPr>
@@ -8596,7 +8596,7 @@
                 <a:solidFill>
                   <a:srgbClr val="FFFFFF"/>
                 </a:solidFill>
-                <a:latin typeface="Calibri" pitchFamily="34" charset="0"/>
+                <a:latin typeface="Amiri" pitchFamily="2" charset="-78"/>
                 <a:ea typeface="Amiri" pitchFamily="2" charset="-78"/>
                 <a:cs typeface="Amiri" pitchFamily="2" charset="-78"/>
               </a:rPr>
@@ -8662,7 +8662,7 @@
                 <a:solidFill>
                   <a:srgbClr val="FFFFFF"/>
                 </a:solidFill>
-                <a:latin typeface="Calibri" pitchFamily="34" charset="0"/>
+                <a:latin typeface="Amiri" pitchFamily="2" charset="-78"/>
                 <a:ea typeface="Amiri" pitchFamily="2" charset="-78"/>
                 <a:cs typeface="Amiri" pitchFamily="2" charset="-78"/>
               </a:rPr>
@@ -8728,7 +8728,7 @@
                 <a:solidFill>
                   <a:srgbClr val="FFFFFF"/>
                 </a:solidFill>
-                <a:latin typeface="Calibri" pitchFamily="34" charset="0"/>
+                <a:latin typeface="Amiri" pitchFamily="2" charset="-78"/>
                 <a:ea typeface="Amiri" pitchFamily="2" charset="-78"/>
                 <a:cs typeface="Amiri" pitchFamily="2" charset="-78"/>
               </a:rPr>
@@ -8794,7 +8794,7 @@
                 <a:solidFill>
                   <a:srgbClr val="FFFFFF"/>
                 </a:solidFill>
-                <a:latin typeface="Calibri" pitchFamily="34" charset="0"/>
+                <a:latin typeface="Amiri" pitchFamily="2" charset="-78"/>
                 <a:ea typeface="Amiri" pitchFamily="2" charset="-78"/>
                 <a:cs typeface="Amiri" pitchFamily="2" charset="-78"/>
               </a:rPr>
@@ -9581,7 +9581,7 @@
                 <a:solidFill>
                   <a:srgbClr val="FFFFFF"/>
                 </a:solidFill>
-                <a:latin typeface="Calibri" pitchFamily="34" charset="0"/>
+                <a:latin typeface="Amiri" pitchFamily="2" charset="-78"/>
                 <a:ea typeface="Amiri" pitchFamily="2" charset="-78"/>
                 <a:cs typeface="Amiri" pitchFamily="2" charset="-78"/>
               </a:rPr>
@@ -9647,7 +9647,7 @@
                 <a:solidFill>
                   <a:srgbClr val="FFFFFF"/>
                 </a:solidFill>
-                <a:latin typeface="Calibri" pitchFamily="34" charset="0"/>
+                <a:latin typeface="Amiri" pitchFamily="2" charset="-78"/>
                 <a:ea typeface="Amiri" pitchFamily="2" charset="-78"/>
                 <a:cs typeface="Amiri" pitchFamily="2" charset="-78"/>
               </a:rPr>
@@ -9713,7 +9713,7 @@
                 <a:solidFill>
                   <a:srgbClr val="FFFFFF"/>
                 </a:solidFill>
-                <a:latin typeface="Calibri" pitchFamily="34" charset="0"/>
+                <a:latin typeface="Amiri" pitchFamily="2" charset="-78"/>
                 <a:ea typeface="Amiri" pitchFamily="2" charset="-78"/>
                 <a:cs typeface="Amiri" pitchFamily="2" charset="-78"/>
               </a:rPr>
@@ -9779,7 +9779,7 @@
                 <a:solidFill>
                   <a:srgbClr val="FFFFFF"/>
                 </a:solidFill>
-                <a:latin typeface="Calibri" pitchFamily="34" charset="0"/>
+                <a:latin typeface="Amiri" pitchFamily="2" charset="-78"/>
                 <a:ea typeface="Amiri" pitchFamily="2" charset="-78"/>
                 <a:cs typeface="Amiri" pitchFamily="2" charset="-78"/>
               </a:rPr>
@@ -10566,7 +10566,7 @@
                 <a:solidFill>
                   <a:srgbClr val="FFFFFF"/>
                 </a:solidFill>
-                <a:latin typeface="Calibri" pitchFamily="34" charset="0"/>
+                <a:latin typeface="Amiri" pitchFamily="2" charset="-78"/>
                 <a:ea typeface="Amiri" pitchFamily="2" charset="-78"/>
                 <a:cs typeface="Amiri" pitchFamily="2" charset="-78"/>
               </a:rPr>
@@ -10632,7 +10632,7 @@
                 <a:solidFill>
                   <a:srgbClr val="FFFFFF"/>
                 </a:solidFill>
-                <a:latin typeface="Calibri" pitchFamily="34" charset="0"/>
+                <a:latin typeface="Amiri" pitchFamily="2" charset="-78"/>
                 <a:ea typeface="Amiri" pitchFamily="2" charset="-78"/>
                 <a:cs typeface="Amiri" pitchFamily="2" charset="-78"/>
               </a:rPr>
@@ -10698,7 +10698,7 @@
                 <a:solidFill>
                   <a:srgbClr val="FFFFFF"/>
                 </a:solidFill>
-                <a:latin typeface="Calibri" pitchFamily="34" charset="0"/>
+                <a:latin typeface="Amiri" pitchFamily="2" charset="-78"/>
                 <a:ea typeface="Amiri" pitchFamily="2" charset="-78"/>
                 <a:cs typeface="Amiri" pitchFamily="2" charset="-78"/>
               </a:rPr>
@@ -10764,7 +10764,7 @@
                 <a:solidFill>
                   <a:srgbClr val="FFFFFF"/>
                 </a:solidFill>
-                <a:latin typeface="Calibri" pitchFamily="34" charset="0"/>
+                <a:latin typeface="Amiri" pitchFamily="2" charset="-78"/>
                 <a:ea typeface="Amiri" pitchFamily="2" charset="-78"/>
                 <a:cs typeface="Amiri" pitchFamily="2" charset="-78"/>
               </a:rPr>
